--- a/CSCI250-Fall2026/content/Week07_ML-Review-Midterm/slides.pptx
+++ b/CSCI250-Fall2026/content/Week07_ML-Review-Midterm/slides.pptx
@@ -4800,7 +4800,7 @@
                 </a:solidFill>
                 <a:latin typeface="Calibri"/>
               </a:rPr>
-              <a:t>• Coverage: Weeks 1–6 (Python → NumPy → Pandas → ML → NN foundations)</a:t>
+              <a:t>• Coverage: Weeks 1–6 (reviewed in Week 7) — Python → NumPy → Pandas → ML → NN</a:t>
             </a:r>
           </a:p>
           <a:p>
